--- a/ppts/7 - Data augmentation.pptx
+++ b/ppts/7 - Data augmentation.pptx
@@ -278,7 +278,7 @@
           <a:p>
             <a:fld id="{15E4F5CE-CB34-4A0C-9595-867A2C0DB20E}" type="datetimeFigureOut">
               <a:rPr lang="nl-BE" smtClean="0"/>
-              <a:t>11/05/2025</a:t>
+              <a:t>22/05/2025</a:t>
             </a:fld>
             <a:endParaRPr lang="nl-BE"/>
           </a:p>
@@ -455,7 +455,7 @@
           <a:p>
             <a:fld id="{4D53584B-980D-4F7D-BA36-682FCDF648BB}" type="datetimeFigureOut">
               <a:rPr lang="nl-BE" smtClean="0"/>
-              <a:t>11/05/2025</a:t>
+              <a:t>22/05/2025</a:t>
             </a:fld>
             <a:endParaRPr lang="nl-BE"/>
           </a:p>
@@ -1931,7 +1931,7 @@
           <a:p>
             <a:fld id="{F456E141-11F1-487F-A892-18B8A63336C7}" type="datetime1">
               <a:rPr lang="nl-BE" smtClean="0"/>
-              <a:t>11/05/2025</a:t>
+              <a:t>22/05/2025</a:t>
             </a:fld>
             <a:endParaRPr lang="nl-BE"/>
           </a:p>
@@ -2247,7 +2247,7 @@
           <a:p>
             <a:fld id="{85CAFD92-94F2-4CD0-8A1D-AA3295115CEC}" type="datetime1">
               <a:rPr lang="nl-BE" smtClean="0"/>
-              <a:t>11/05/2025</a:t>
+              <a:t>22/05/2025</a:t>
             </a:fld>
             <a:endParaRPr lang="nl-BE"/>
           </a:p>
@@ -2427,7 +2427,7 @@
           <a:p>
             <a:fld id="{02B84EFA-B363-4043-A12E-44B39EC7D05B}" type="datetime1">
               <a:rPr lang="nl-BE" smtClean="0"/>
-              <a:t>11/05/2025</a:t>
+              <a:t>22/05/2025</a:t>
             </a:fld>
             <a:endParaRPr lang="nl-BE"/>
           </a:p>
@@ -2626,7 +2626,7 @@
           <a:p>
             <a:fld id="{B7AA89A6-C9B9-4556-BC9E-5E3CF3322A33}" type="datetime1">
               <a:rPr lang="nl-BE" smtClean="0"/>
-              <a:t>11/05/2025</a:t>
+              <a:t>22/05/2025</a:t>
             </a:fld>
             <a:endParaRPr lang="nl-BE"/>
           </a:p>
@@ -2877,7 +2877,7 @@
           <a:p>
             <a:fld id="{6CEB42D4-4FBB-465F-AE58-8ADBDBF671C8}" type="datetime1">
               <a:rPr lang="nl-BE" smtClean="0"/>
-              <a:t>11/05/2025</a:t>
+              <a:t>22/05/2025</a:t>
             </a:fld>
             <a:endParaRPr lang="nl-BE"/>
           </a:p>
@@ -3109,7 +3109,7 @@
           <a:p>
             <a:fld id="{64B405D5-C0FD-42E0-9EB1-2670F471B7BB}" type="datetime1">
               <a:rPr lang="nl-BE" smtClean="0"/>
-              <a:t>11/05/2025</a:t>
+              <a:t>22/05/2025</a:t>
             </a:fld>
             <a:endParaRPr lang="nl-BE"/>
           </a:p>
@@ -3476,7 +3476,7 @@
           <a:p>
             <a:fld id="{4CB55C39-C031-448F-A58F-CA88F7B6F786}" type="datetime1">
               <a:rPr lang="nl-BE" smtClean="0"/>
-              <a:t>11/05/2025</a:t>
+              <a:t>22/05/2025</a:t>
             </a:fld>
             <a:endParaRPr lang="nl-BE"/>
           </a:p>
@@ -3594,7 +3594,7 @@
           <a:p>
             <a:fld id="{E29307F5-1DF0-4FFF-91A4-1E1A6A26A94A}" type="datetime1">
               <a:rPr lang="nl-BE" smtClean="0"/>
-              <a:t>11/05/2025</a:t>
+              <a:t>22/05/2025</a:t>
             </a:fld>
             <a:endParaRPr lang="nl-BE"/>
           </a:p>
@@ -3689,7 +3689,7 @@
           <a:p>
             <a:fld id="{00A9168B-A159-4E9D-A6C6-C6786C6AB2EB}" type="datetime1">
               <a:rPr lang="nl-BE" smtClean="0"/>
-              <a:t>11/05/2025</a:t>
+              <a:t>22/05/2025</a:t>
             </a:fld>
             <a:endParaRPr lang="nl-BE"/>
           </a:p>
@@ -3966,7 +3966,7 @@
           <a:p>
             <a:fld id="{E9D22159-AF82-4D23-BC06-D4277BDD9BAD}" type="datetime1">
               <a:rPr lang="nl-BE" smtClean="0"/>
-              <a:t>11/05/2025</a:t>
+              <a:t>22/05/2025</a:t>
             </a:fld>
             <a:endParaRPr lang="nl-BE"/>
           </a:p>
@@ -4219,7 +4219,7 @@
           <a:p>
             <a:fld id="{D08A7014-C292-4E4F-926C-1A31F538B52A}" type="datetime1">
               <a:rPr lang="nl-BE" smtClean="0"/>
-              <a:t>11/05/2025</a:t>
+              <a:t>22/05/2025</a:t>
             </a:fld>
             <a:endParaRPr lang="nl-BE"/>
           </a:p>
@@ -4432,7 +4432,7 @@
           <a:p>
             <a:fld id="{E9CC7161-F687-474C-905A-3CCBBA535086}" type="datetime1">
               <a:rPr lang="nl-BE" smtClean="0"/>
-              <a:t>11/05/2025</a:t>
+              <a:t>22/05/2025</a:t>
             </a:fld>
             <a:endParaRPr lang="nl-BE"/>
           </a:p>
@@ -5390,7 +5390,7 @@
           <a:p>
             <a:r>
               <a:rPr lang="en-US" dirty="0"/>
-              <a:t>[S]he’ll help you understand which fields are important and which not, which outliers are safe to throw away, how data can be imputed, …</a:t>
+              <a:t>They help you understand which fields are important and which not, which outliers are safe to throw away, how data can be imputed, …</a:t>
             </a:r>
           </a:p>
           <a:p>
@@ -20439,7 +20439,7 @@
           <a:p>
             <a:r>
               <a:rPr lang="en-US" dirty="0"/>
-              <a:t>Why Feature Engineering Matters</a:t>
+              <a:t>Why feature engineering matters</a:t>
             </a:r>
           </a:p>
           <a:p>
@@ -21209,12 +21209,8 @@
           </a:p>
           <a:p>
             <a:r>
-              <a:rPr lang="en-US" dirty="0" err="1"/>
-              <a:t>Assignemt</a:t>
-            </a:r>
-            <a:r>
-              <a:rPr lang="en-US" dirty="0"/>
-              <a:t> for students in the data science course:</a:t>
+              <a:rPr lang="en-US" dirty="0"/>
+              <a:t>Assignment for students in the data science course:</a:t>
             </a:r>
             <a:br>
               <a:rPr lang="en-US" dirty="0"/>

--- a/ppts/7 - Data augmentation.pptx
+++ b/ppts/7 - Data augmentation.pptx
@@ -278,7 +278,7 @@
           <a:p>
             <a:fld id="{15E4F5CE-CB34-4A0C-9595-867A2C0DB20E}" type="datetimeFigureOut">
               <a:rPr lang="nl-BE" smtClean="0"/>
-              <a:t>22/05/2025</a:t>
+              <a:t>4/06/2026</a:t>
             </a:fld>
             <a:endParaRPr lang="nl-BE"/>
           </a:p>
@@ -455,7 +455,7 @@
           <a:p>
             <a:fld id="{4D53584B-980D-4F7D-BA36-682FCDF648BB}" type="datetimeFigureOut">
               <a:rPr lang="nl-BE" smtClean="0"/>
-              <a:t>22/05/2025</a:t>
+              <a:t>4/06/2026</a:t>
             </a:fld>
             <a:endParaRPr lang="nl-BE"/>
           </a:p>
@@ -1931,7 +1931,7 @@
           <a:p>
             <a:fld id="{F456E141-11F1-487F-A892-18B8A63336C7}" type="datetime1">
               <a:rPr lang="nl-BE" smtClean="0"/>
-              <a:t>22/05/2025</a:t>
+              <a:t>4/06/2026</a:t>
             </a:fld>
             <a:endParaRPr lang="nl-BE"/>
           </a:p>
@@ -2247,7 +2247,7 @@
           <a:p>
             <a:fld id="{85CAFD92-94F2-4CD0-8A1D-AA3295115CEC}" type="datetime1">
               <a:rPr lang="nl-BE" smtClean="0"/>
-              <a:t>22/05/2025</a:t>
+              <a:t>4/06/2026</a:t>
             </a:fld>
             <a:endParaRPr lang="nl-BE"/>
           </a:p>
@@ -2427,7 +2427,7 @@
           <a:p>
             <a:fld id="{02B84EFA-B363-4043-A12E-44B39EC7D05B}" type="datetime1">
               <a:rPr lang="nl-BE" smtClean="0"/>
-              <a:t>22/05/2025</a:t>
+              <a:t>4/06/2026</a:t>
             </a:fld>
             <a:endParaRPr lang="nl-BE"/>
           </a:p>
@@ -2626,7 +2626,7 @@
           <a:p>
             <a:fld id="{B7AA89A6-C9B9-4556-BC9E-5E3CF3322A33}" type="datetime1">
               <a:rPr lang="nl-BE" smtClean="0"/>
-              <a:t>22/05/2025</a:t>
+              <a:t>4/06/2026</a:t>
             </a:fld>
             <a:endParaRPr lang="nl-BE"/>
           </a:p>
@@ -2877,7 +2877,7 @@
           <a:p>
             <a:fld id="{6CEB42D4-4FBB-465F-AE58-8ADBDBF671C8}" type="datetime1">
               <a:rPr lang="nl-BE" smtClean="0"/>
-              <a:t>22/05/2025</a:t>
+              <a:t>4/06/2026</a:t>
             </a:fld>
             <a:endParaRPr lang="nl-BE"/>
           </a:p>
@@ -3109,7 +3109,7 @@
           <a:p>
             <a:fld id="{64B405D5-C0FD-42E0-9EB1-2670F471B7BB}" type="datetime1">
               <a:rPr lang="nl-BE" smtClean="0"/>
-              <a:t>22/05/2025</a:t>
+              <a:t>4/06/2026</a:t>
             </a:fld>
             <a:endParaRPr lang="nl-BE"/>
           </a:p>
@@ -3476,7 +3476,7 @@
           <a:p>
             <a:fld id="{4CB55C39-C031-448F-A58F-CA88F7B6F786}" type="datetime1">
               <a:rPr lang="nl-BE" smtClean="0"/>
-              <a:t>22/05/2025</a:t>
+              <a:t>4/06/2026</a:t>
             </a:fld>
             <a:endParaRPr lang="nl-BE"/>
           </a:p>
@@ -3594,7 +3594,7 @@
           <a:p>
             <a:fld id="{E29307F5-1DF0-4FFF-91A4-1E1A6A26A94A}" type="datetime1">
               <a:rPr lang="nl-BE" smtClean="0"/>
-              <a:t>22/05/2025</a:t>
+              <a:t>4/06/2026</a:t>
             </a:fld>
             <a:endParaRPr lang="nl-BE"/>
           </a:p>
@@ -3689,7 +3689,7 @@
           <a:p>
             <a:fld id="{00A9168B-A159-4E9D-A6C6-C6786C6AB2EB}" type="datetime1">
               <a:rPr lang="nl-BE" smtClean="0"/>
-              <a:t>22/05/2025</a:t>
+              <a:t>4/06/2026</a:t>
             </a:fld>
             <a:endParaRPr lang="nl-BE"/>
           </a:p>
@@ -3966,7 +3966,7 @@
           <a:p>
             <a:fld id="{E9D22159-AF82-4D23-BC06-D4277BDD9BAD}" type="datetime1">
               <a:rPr lang="nl-BE" smtClean="0"/>
-              <a:t>22/05/2025</a:t>
+              <a:t>4/06/2026</a:t>
             </a:fld>
             <a:endParaRPr lang="nl-BE"/>
           </a:p>
@@ -4219,7 +4219,7 @@
           <a:p>
             <a:fld id="{D08A7014-C292-4E4F-926C-1A31F538B52A}" type="datetime1">
               <a:rPr lang="nl-BE" smtClean="0"/>
-              <a:t>22/05/2025</a:t>
+              <a:t>4/06/2026</a:t>
             </a:fld>
             <a:endParaRPr lang="nl-BE"/>
           </a:p>
@@ -4432,7 +4432,7 @@
           <a:p>
             <a:fld id="{E9CC7161-F687-474C-905A-3CCBBA535086}" type="datetime1">
               <a:rPr lang="nl-BE" smtClean="0"/>
-              <a:t>22/05/2025</a:t>
+              <a:t>4/06/2026</a:t>
             </a:fld>
             <a:endParaRPr lang="nl-BE"/>
           </a:p>
@@ -15899,6 +15899,11 @@
               <a:rPr lang="en-US" dirty="0"/>
               <a:t>Because there is one diamond in the set with a Y-value of around 60</a:t>
             </a:r>
+            <a:r>
+              <a:rPr lang="en-BE" dirty="0"/>
+              <a:t> mm</a:t>
+            </a:r>
+            <a:endParaRPr lang="en-US" dirty="0"/>
           </a:p>
           <a:p>
             <a:pPr lvl="1"/>
@@ -20032,7 +20037,15 @@
           <a:p>
             <a:r>
               <a:rPr lang="en-US" dirty="0"/>
-              <a:t>But is it needed, the data is in separate columns after all…</a:t>
+              <a:t>But is it needed</a:t>
+            </a:r>
+            <a:r>
+              <a:rPr lang="en-BE" dirty="0"/>
+              <a:t>? T</a:t>
+            </a:r>
+            <a:r>
+              <a:rPr lang="en-US" dirty="0"/>
+              <a:t>he data is in separate columns after all…</a:t>
             </a:r>
           </a:p>
           <a:p>
